--- a/READ ME.pptx
+++ b/READ ME.pptx
@@ -262,7 +262,7 @@
           <a:p>
             <a:fld id="{EBCC8259-C66C-4995-B407-263CDFC6BADE}" type="datetimeFigureOut">
               <a:rPr lang="en-US" smtClean="0"/>
-              <a:t>1/8/2026</a:t>
+              <a:t>5/29/2026</a:t>
             </a:fld>
             <a:endParaRPr lang="en-US"/>
           </a:p>
@@ -473,7 +473,7 @@
           <a:p>
             <a:fld id="{EBCC8259-C66C-4995-B407-263CDFC6BADE}" type="datetimeFigureOut">
               <a:rPr lang="en-US" smtClean="0"/>
-              <a:t>1/8/2026</a:t>
+              <a:t>5/29/2026</a:t>
             </a:fld>
             <a:endParaRPr lang="en-US"/>
           </a:p>
@@ -688,7 +688,7 @@
           <a:p>
             <a:fld id="{EBCC8259-C66C-4995-B407-263CDFC6BADE}" type="datetimeFigureOut">
               <a:rPr lang="en-US" smtClean="0"/>
-              <a:t>1/8/2026</a:t>
+              <a:t>5/29/2026</a:t>
             </a:fld>
             <a:endParaRPr lang="en-US"/>
           </a:p>
@@ -889,7 +889,7 @@
           <a:p>
             <a:fld id="{EBCC8259-C66C-4995-B407-263CDFC6BADE}" type="datetimeFigureOut">
               <a:rPr lang="en-US" smtClean="0"/>
-              <a:t>1/8/2026</a:t>
+              <a:t>5/29/2026</a:t>
             </a:fld>
             <a:endParaRPr lang="en-US"/>
           </a:p>
@@ -1168,7 +1168,7 @@
           <a:p>
             <a:fld id="{EBCC8259-C66C-4995-B407-263CDFC6BADE}" type="datetimeFigureOut">
               <a:rPr lang="en-US" smtClean="0"/>
-              <a:t>1/8/2026</a:t>
+              <a:t>5/29/2026</a:t>
             </a:fld>
             <a:endParaRPr lang="en-US"/>
           </a:p>
@@ -1436,7 +1436,7 @@
           <a:p>
             <a:fld id="{EBCC8259-C66C-4995-B407-263CDFC6BADE}" type="datetimeFigureOut">
               <a:rPr lang="en-US" smtClean="0"/>
-              <a:t>1/8/2026</a:t>
+              <a:t>5/29/2026</a:t>
             </a:fld>
             <a:endParaRPr lang="en-US"/>
           </a:p>
@@ -1852,7 +1852,7 @@
           <a:p>
             <a:fld id="{EBCC8259-C66C-4995-B407-263CDFC6BADE}" type="datetimeFigureOut">
               <a:rPr lang="en-US" smtClean="0"/>
-              <a:t>1/8/2026</a:t>
+              <a:t>5/29/2026</a:t>
             </a:fld>
             <a:endParaRPr lang="en-US"/>
           </a:p>
@@ -2001,7 +2001,7 @@
           <a:p>
             <a:fld id="{EBCC8259-C66C-4995-B407-263CDFC6BADE}" type="datetimeFigureOut">
               <a:rPr lang="en-US" smtClean="0"/>
-              <a:t>1/8/2026</a:t>
+              <a:t>5/29/2026</a:t>
             </a:fld>
             <a:endParaRPr lang="en-US"/>
           </a:p>
@@ -2127,7 +2127,7 @@
           <a:p>
             <a:fld id="{EBCC8259-C66C-4995-B407-263CDFC6BADE}" type="datetimeFigureOut">
               <a:rPr lang="en-US" smtClean="0"/>
-              <a:t>1/8/2026</a:t>
+              <a:t>5/29/2026</a:t>
             </a:fld>
             <a:endParaRPr lang="en-US"/>
           </a:p>
@@ -2378,7 +2378,7 @@
           <a:p>
             <a:fld id="{EBCC8259-C66C-4995-B407-263CDFC6BADE}" type="datetimeFigureOut">
               <a:rPr lang="en-US" smtClean="0"/>
-              <a:t>1/8/2026</a:t>
+              <a:t>5/29/2026</a:t>
             </a:fld>
             <a:endParaRPr lang="en-US"/>
           </a:p>
@@ -2823,7 +2823,7 @@
           <a:p>
             <a:fld id="{EBCC8259-C66C-4995-B407-263CDFC6BADE}" type="datetimeFigureOut">
               <a:rPr lang="en-US" smtClean="0"/>
-              <a:t>1/8/2026</a:t>
+              <a:t>5/29/2026</a:t>
             </a:fld>
             <a:endParaRPr lang="en-US"/>
           </a:p>
@@ -3150,7 +3150,7 @@
           <a:p>
             <a:fld id="{EBCC8259-C66C-4995-B407-263CDFC6BADE}" type="datetimeFigureOut">
               <a:rPr lang="en-US" smtClean="0"/>
-              <a:t>1/8/2026</a:t>
+              <a:t>5/29/2026</a:t>
             </a:fld>
             <a:endParaRPr lang="en-US"/>
           </a:p>
@@ -4426,7 +4426,7 @@
         <p:spPr/>
         <p:txBody>
           <a:bodyPr>
-            <a:normAutofit fontScale="85000" lnSpcReduction="10000"/>
+            <a:normAutofit fontScale="85000" lnSpcReduction="20000"/>
           </a:bodyPr>
           <a:lstStyle/>
           <a:p>
@@ -4460,31 +4460,57 @@
             </a:r>
             <a:r>
               <a:rPr lang="en-US" b="1" dirty="0"/>
-              <a:t>Google API Key</a:t>
+              <a:t>Google Cloud Project</a:t>
             </a:r>
             <a:r>
               <a:rPr lang="en-US" dirty="0"/>
-              <a:t>:  This is a special password that connects the program to Google Gemini AI. You can get a free one from the Google Cloud Console (</a:t>
+              <a:t>: Create a google cloud project at </a:t>
             </a:r>
             <a:r>
               <a:rPr lang="en-US" dirty="0">
                 <a:hlinkClick r:id="rId3"/>
               </a:rPr>
-              <a:t>https://console.cloud.google.com/</a:t>
+              <a:t>https://cloud.google.com</a:t>
             </a:r>
             <a:r>
               <a:rPr lang="en-US" dirty="0"/>
-              <a:t>). Here are the instructions on how to do it: </a:t>
+              <a:t>. Enable Vertex API at </a:t>
             </a:r>
             <a:r>
               <a:rPr lang="en-US" dirty="0">
                 <a:hlinkClick r:id="rId4"/>
               </a:rPr>
-              <a:t>https://www.youtube.com/watch?v=brCkpzAD0gc</a:t>
+              <a:t>https://console.cloud.google.com/apis/library/aiplatform.googleapis.com</a:t>
             </a:r>
             <a:r>
               <a:rPr lang="en-US" dirty="0"/>
-              <a:t> </a:t>
+              <a:t>. Download and install </a:t>
+            </a:r>
+            <a:r>
+              <a:rPr lang="en-US" dirty="0" err="1"/>
+              <a:t>gcloud</a:t>
+            </a:r>
+            <a:r>
+              <a:rPr lang="en-US" dirty="0"/>
+              <a:t> from </a:t>
+            </a:r>
+            <a:r>
+              <a:rPr lang="en-US" dirty="0">
+                <a:hlinkClick r:id="rId5"/>
+              </a:rPr>
+              <a:t>https://cloud.google.com/sdk/docs/install</a:t>
+            </a:r>
+            <a:r>
+              <a:rPr lang="en-US" dirty="0"/>
+              <a:t>. Open a new terminal and run: </a:t>
+            </a:r>
+            <a:r>
+              <a:rPr lang="en-US" dirty="0" err="1"/>
+              <a:t>gcloud</a:t>
+            </a:r>
+            <a:r>
+              <a:rPr lang="en-US" dirty="0"/>
+              <a:t> auth application-default login</a:t>
             </a:r>
           </a:p>
           <a:p>
